--- a/docs/slide_thuyet_trinh.pptx
+++ b/docs/slide_thuyet_trinh.pptx
@@ -5,10 +5,10 @@
     <p:sldMasterId id="2147483648" r:id="rId1"/>
   </p:sldMasterIdLst>
   <p:notesMasterIdLst>
-    <p:notesMasterId r:id="rId26"/>
+    <p:notesMasterId r:id="rId25"/>
   </p:notesMasterIdLst>
   <p:handoutMasterIdLst>
-    <p:handoutMasterId r:id="rId27"/>
+    <p:handoutMasterId r:id="rId26"/>
   </p:handoutMasterIdLst>
   <p:sldIdLst>
     <p:sldId id="256" r:id="rId2"/>
@@ -29,17 +29,16 @@
     <p:sldId id="293" r:id="rId17"/>
     <p:sldId id="295" r:id="rId18"/>
     <p:sldId id="297" r:id="rId19"/>
-    <p:sldId id="309" r:id="rId20"/>
-    <p:sldId id="310" r:id="rId21"/>
-    <p:sldId id="311" r:id="rId22"/>
-    <p:sldId id="312" r:id="rId23"/>
-    <p:sldId id="306" r:id="rId24"/>
-    <p:sldId id="272" r:id="rId25"/>
+    <p:sldId id="310" r:id="rId20"/>
+    <p:sldId id="311" r:id="rId21"/>
+    <p:sldId id="312" r:id="rId22"/>
+    <p:sldId id="306" r:id="rId23"/>
+    <p:sldId id="272" r:id="rId24"/>
   </p:sldIdLst>
   <p:sldSz cx="9144000" cy="6858000" type="screen4x3"/>
   <p:notesSz cx="6858000" cy="9144000"/>
   <p:custDataLst>
-    <p:tags r:id="rId28"/>
+    <p:tags r:id="rId27"/>
   </p:custDataLst>
   <p:defaultTextStyle>
     <a:defPPr>
@@ -7721,7 +7720,7 @@
         <p:cNvPr id="1" name="">
           <a:extLst>
             <a:ext uri="{FF2B5EF4-FFF2-40B4-BE49-F238E27FC236}">
-              <a16:creationId xmlns:a16="http://schemas.microsoft.com/office/drawing/2014/main" id="{F6079476-28EB-3CD1-7CD7-C2A83C89B192}"/>
+              <a16:creationId xmlns:a16="http://schemas.microsoft.com/office/drawing/2014/main" id="{9BF364FB-2885-8C60-5B02-87439A227D4C}"/>
             </a:ext>
           </a:extLst>
         </p:cNvPr>
@@ -7741,7 +7740,7 @@
           <p:cNvPr id="2" name="Title 1">
             <a:extLst>
               <a:ext uri="{FF2B5EF4-FFF2-40B4-BE49-F238E27FC236}">
-                <a16:creationId xmlns:a16="http://schemas.microsoft.com/office/drawing/2014/main" id="{448E39DB-3231-F3D5-5233-122358294210}"/>
+                <a16:creationId xmlns:a16="http://schemas.microsoft.com/office/drawing/2014/main" id="{0C2E219A-4166-0E6B-FE00-B7152AF3E255}"/>
               </a:ext>
             </a:extLst>
           </p:cNvPr>
@@ -7852,10 +7851,10 @@
       </p:sp>
       <p:pic>
         <p:nvPicPr>
-          <p:cNvPr id="5" name="Picture 4">
+          <p:cNvPr id="4" name="Picture 3">
             <a:extLst>
               <a:ext uri="{FF2B5EF4-FFF2-40B4-BE49-F238E27FC236}">
-                <a16:creationId xmlns:a16="http://schemas.microsoft.com/office/drawing/2014/main" id="{D1CED5A3-6C88-8273-D76F-6FCA837CA0AB}"/>
+                <a16:creationId xmlns:a16="http://schemas.microsoft.com/office/drawing/2014/main" id="{892ABA2C-5940-3955-BC2D-C40E511B2A28}"/>
               </a:ext>
             </a:extLst>
           </p:cNvPr>
@@ -7872,8 +7871,8 @@
         </p:blipFill>
         <p:spPr>
           <a:xfrm>
-            <a:off x="1585912" y="1991677"/>
-            <a:ext cx="5972175" cy="2874645"/>
+            <a:off x="424338" y="1449324"/>
+            <a:ext cx="8295323" cy="3959352"/>
           </a:xfrm>
           <a:prstGeom prst="rect">
             <a:avLst/>
@@ -7883,7 +7882,7 @@
     </p:spTree>
     <p:extLst>
       <p:ext uri="{BB962C8B-B14F-4D97-AF65-F5344CB8AC3E}">
-        <p14:creationId xmlns:p14="http://schemas.microsoft.com/office/powerpoint/2010/main" val="2974395687"/>
+        <p14:creationId xmlns:p14="http://schemas.microsoft.com/office/powerpoint/2010/main" val="2039661265"/>
       </p:ext>
     </p:extLst>
   </p:cSld>
@@ -8537,186 +8536,6 @@
         <p:cNvPr id="1" name="">
           <a:extLst>
             <a:ext uri="{FF2B5EF4-FFF2-40B4-BE49-F238E27FC236}">
-              <a16:creationId xmlns:a16="http://schemas.microsoft.com/office/drawing/2014/main" id="{9BF364FB-2885-8C60-5B02-87439A227D4C}"/>
-            </a:ext>
-          </a:extLst>
-        </p:cNvPr>
-        <p:cNvGrpSpPr/>
-        <p:nvPr/>
-      </p:nvGrpSpPr>
-      <p:grpSpPr>
-        <a:xfrm>
-          <a:off x="0" y="0"/>
-          <a:ext cx="0" cy="0"/>
-          <a:chOff x="0" y="0"/>
-          <a:chExt cx="0" cy="0"/>
-        </a:xfrm>
-      </p:grpSpPr>
-      <p:sp>
-        <p:nvSpPr>
-          <p:cNvPr id="2" name="Title 1">
-            <a:extLst>
-              <a:ext uri="{FF2B5EF4-FFF2-40B4-BE49-F238E27FC236}">
-                <a16:creationId xmlns:a16="http://schemas.microsoft.com/office/drawing/2014/main" id="{0C2E219A-4166-0E6B-FE00-B7152AF3E255}"/>
-              </a:ext>
-            </a:extLst>
-          </p:cNvPr>
-          <p:cNvSpPr>
-            <a:spLocks noGrp="1"/>
-          </p:cNvSpPr>
-          <p:nvPr>
-            <p:ph type="title"/>
-          </p:nvPr>
-        </p:nvSpPr>
-        <p:spPr>
-          <a:xfrm>
-            <a:off x="628650" y="365125"/>
-            <a:ext cx="7886700" cy="380365"/>
-          </a:xfrm>
-        </p:spPr>
-        <p:txBody>
-          <a:bodyPr/>
-          <a:lstStyle/>
-          <a:p>
-            <a:r>
-              <a:rPr lang="en-US" altLang="vi-VN" sz="3600" b="1" noProof="0" dirty="0">
-                <a:ln>
-                  <a:noFill/>
-                </a:ln>
-                <a:solidFill>
-                  <a:schemeClr val="accent5">
-                    <a:lumMod val="50000"/>
-                  </a:schemeClr>
-                </a:solidFill>
-                <a:effectLst/>
-                <a:uLnTx/>
-                <a:uFillTx/>
-                <a:latin typeface="Arial" panose="020B0604020202020204" pitchFamily="34" charset="0"/>
-                <a:cs typeface="Arial" panose="020B0604020202020204" pitchFamily="34" charset="0"/>
-                <a:sym typeface="+mn-ea"/>
-              </a:rPr>
-              <a:t>6. </a:t>
-            </a:r>
-            <a:r>
-              <a:rPr lang="en-US" altLang="vi-VN" sz="3600" b="1" noProof="0" dirty="0" err="1">
-                <a:ln>
-                  <a:noFill/>
-                </a:ln>
-                <a:solidFill>
-                  <a:schemeClr val="accent5">
-                    <a:lumMod val="50000"/>
-                  </a:schemeClr>
-                </a:solidFill>
-                <a:effectLst/>
-                <a:uLnTx/>
-                <a:uFillTx/>
-                <a:latin typeface="Arial" panose="020B0604020202020204" pitchFamily="34" charset="0"/>
-                <a:cs typeface="Arial" panose="020B0604020202020204" pitchFamily="34" charset="0"/>
-                <a:sym typeface="+mn-ea"/>
-              </a:rPr>
-              <a:t>Kết</a:t>
-            </a:r>
-            <a:r>
-              <a:rPr lang="en-US" altLang="vi-VN" sz="3600" b="1" noProof="0" dirty="0">
-                <a:ln>
-                  <a:noFill/>
-                </a:ln>
-                <a:solidFill>
-                  <a:schemeClr val="accent5">
-                    <a:lumMod val="50000"/>
-                  </a:schemeClr>
-                </a:solidFill>
-                <a:effectLst/>
-                <a:uLnTx/>
-                <a:uFillTx/>
-                <a:latin typeface="Arial" panose="020B0604020202020204" pitchFamily="34" charset="0"/>
-                <a:cs typeface="Arial" panose="020B0604020202020204" pitchFamily="34" charset="0"/>
-                <a:sym typeface="+mn-ea"/>
-              </a:rPr>
-              <a:t> </a:t>
-            </a:r>
-            <a:r>
-              <a:rPr lang="en-US" altLang="vi-VN" sz="3600" b="1" noProof="0" dirty="0" err="1">
-                <a:ln>
-                  <a:noFill/>
-                </a:ln>
-                <a:solidFill>
-                  <a:schemeClr val="accent5">
-                    <a:lumMod val="50000"/>
-                  </a:schemeClr>
-                </a:solidFill>
-                <a:effectLst/>
-                <a:uLnTx/>
-                <a:uFillTx/>
-                <a:latin typeface="Arial" panose="020B0604020202020204" pitchFamily="34" charset="0"/>
-                <a:cs typeface="Arial" panose="020B0604020202020204" pitchFamily="34" charset="0"/>
-                <a:sym typeface="+mn-ea"/>
-              </a:rPr>
-              <a:t>quả</a:t>
-            </a:r>
-            <a:endParaRPr lang="en-US" altLang="en-US" sz="3600" b="1" dirty="0">
-              <a:solidFill>
-                <a:schemeClr val="accent5">
-                  <a:lumMod val="50000"/>
-                </a:schemeClr>
-              </a:solidFill>
-              <a:latin typeface="Arial" panose="020B0604020202020204" pitchFamily="34" charset="0"/>
-              <a:cs typeface="Arial" panose="020B0604020202020204" pitchFamily="34" charset="0"/>
-            </a:endParaRPr>
-          </a:p>
-        </p:txBody>
-      </p:sp>
-      <p:pic>
-        <p:nvPicPr>
-          <p:cNvPr id="4" name="Picture 3">
-            <a:extLst>
-              <a:ext uri="{FF2B5EF4-FFF2-40B4-BE49-F238E27FC236}">
-                <a16:creationId xmlns:a16="http://schemas.microsoft.com/office/drawing/2014/main" id="{892ABA2C-5940-3955-BC2D-C40E511B2A28}"/>
-              </a:ext>
-            </a:extLst>
-          </p:cNvPr>
-          <p:cNvPicPr>
-            <a:picLocks noChangeAspect="1"/>
-          </p:cNvPicPr>
-          <p:nvPr/>
-        </p:nvPicPr>
-        <p:blipFill>
-          <a:blip r:embed="rId2"/>
-          <a:stretch>
-            <a:fillRect/>
-          </a:stretch>
-        </p:blipFill>
-        <p:spPr>
-          <a:xfrm>
-            <a:off x="424338" y="1449324"/>
-            <a:ext cx="8295323" cy="3959352"/>
-          </a:xfrm>
-          <a:prstGeom prst="rect">
-            <a:avLst/>
-          </a:prstGeom>
-        </p:spPr>
-      </p:pic>
-    </p:spTree>
-    <p:extLst>
-      <p:ext uri="{BB962C8B-B14F-4D97-AF65-F5344CB8AC3E}">
-        <p14:creationId xmlns:p14="http://schemas.microsoft.com/office/powerpoint/2010/main" val="2039661265"/>
-      </p:ext>
-    </p:extLst>
-  </p:cSld>
-  <p:clrMapOvr>
-    <a:masterClrMapping/>
-  </p:clrMapOvr>
-</p:sld>
-</file>
-
-<file path=ppt/slides/slide21.xml><?xml version="1.0" encoding="utf-8"?>
-<p:sld xmlns:a="http://schemas.openxmlformats.org/drawingml/2006/main" xmlns:r="http://schemas.openxmlformats.org/officeDocument/2006/relationships" xmlns:p="http://schemas.openxmlformats.org/presentationml/2006/main">
-  <p:cSld>
-    <p:spTree>
-      <p:nvGrpSpPr>
-        <p:cNvPr id="1" name="">
-          <a:extLst>
-            <a:ext uri="{FF2B5EF4-FFF2-40B4-BE49-F238E27FC236}">
               <a16:creationId xmlns:a16="http://schemas.microsoft.com/office/drawing/2014/main" id="{C589FE53-881E-34AA-43A3-E6621F8F8E14}"/>
             </a:ext>
           </a:extLst>
@@ -8889,7 +8708,7 @@
 </p:sld>
 </file>
 
-<file path=ppt/slides/slide22.xml><?xml version="1.0" encoding="utf-8"?>
+<file path=ppt/slides/slide21.xml><?xml version="1.0" encoding="utf-8"?>
 <p:sld xmlns:a="http://schemas.openxmlformats.org/drawingml/2006/main" xmlns:r="http://schemas.openxmlformats.org/officeDocument/2006/relationships" xmlns:p="http://schemas.openxmlformats.org/presentationml/2006/main">
   <p:cSld>
     <p:spTree>
@@ -9069,7 +8888,7 @@
 </p:sld>
 </file>
 
-<file path=ppt/slides/slide23.xml><?xml version="1.0" encoding="utf-8"?>
+<file path=ppt/slides/slide22.xml><?xml version="1.0" encoding="utf-8"?>
 <p:sld xmlns:a="http://schemas.openxmlformats.org/drawingml/2006/main" xmlns:r="http://schemas.openxmlformats.org/officeDocument/2006/relationships" xmlns:p="http://schemas.openxmlformats.org/presentationml/2006/main">
   <p:cSld>
     <p:spTree>
@@ -9316,7 +9135,7 @@
 </p:sld>
 </file>
 
-<file path=ppt/slides/slide24.xml><?xml version="1.0" encoding="utf-8"?>
+<file path=ppt/slides/slide23.xml><?xml version="1.0" encoding="utf-8"?>
 <p:sld xmlns:a="http://schemas.openxmlformats.org/drawingml/2006/main" xmlns:r="http://schemas.openxmlformats.org/officeDocument/2006/relationships" xmlns:p="http://schemas.openxmlformats.org/presentationml/2006/main">
   <p:cSld>
     <p:spTree>
@@ -9459,7 +9278,7 @@
             <a:pPr lvl="0" algn="r" eaLnBrk="1" hangingPunct="1"/>
             <a:fld id="{9A0DB2DC-4C9A-4742-B13C-FB6460FD3503}" type="slidenum">
               <a:rPr lang="en-US" altLang="en-US" sz="900" dirty="0"/>
-              <a:t>24</a:t>
+              <a:t>23</a:t>
             </a:fld>
             <a:endParaRPr lang="en-US" altLang="en-US" sz="900" dirty="0"/>
           </a:p>
